--- a/tests/golden/visual/composition/v1_drawing_focus/deck.pptx
+++ b/tests/golden/visual/composition/v1_drawing_focus/deck.pptx
@@ -910,7 +910,7 @@
         <p:spPr>
           <a:xfrm>
             <a:off x="640080" y="411480"/>
-            <a:ext cx="7863840" cy="457200"/>
+            <a:ext cx="7863840" cy="601218"/>
           </a:xfrm>
           <a:prstGeom prst="rect">
             <a:avLst/>
@@ -948,8 +948,8 @@
         </p:nvSpPr>
         <p:spPr>
           <a:xfrm>
-            <a:off x="640080" y="944880"/>
-            <a:ext cx="5552237" cy="2933700"/>
+            <a:off x="640080" y="1088898"/>
+            <a:ext cx="5552237" cy="2789682"/>
           </a:xfrm>
           <a:prstGeom prst="rect">
             <a:avLst/>
@@ -957,11 +957,11 @@
           <a:solidFill>
             <a:srgbClr val="FFFFFF"/>
           </a:solidFill>
-          <a:ln w="12700">
+          <a:ln w="19050">
             <a:solidFill>
-              <a:srgbClr val="8B4513"/>
+              <a:srgbClr val="C47B2B"/>
             </a:solidFill>
-            <a:prstDash val="solid"/>
+            <a:prstDash val="dash"/>
           </a:ln>
         </p:spPr>
       </p:sp>
@@ -973,7 +973,7 @@
         </p:nvSpPr>
         <p:spPr>
           <a:xfrm>
-            <a:off x="777240" y="2228850"/>
+            <a:off x="777240" y="2300859"/>
             <a:ext cx="5277917" cy="365760"/>
           </a:xfrm>
           <a:prstGeom prst="rect">
@@ -998,7 +998,7 @@
                 <a:ea typeface="Microsoft YaHei" pitchFamily="34" charset="-122"/>
                 <a:cs typeface="Microsoft YaHei" pitchFamily="34" charset="-120"/>
               </a:rPr>
-              <a:t>图纸占位</a:t>
+              <a:t>技术图纸缺失</a:t>
             </a:r>
             <a:endParaRPr lang="en-US" sz="1200" dirty="0"/>
           </a:p>
@@ -1012,8 +1012,8 @@
         </p:nvSpPr>
         <p:spPr>
           <a:xfrm>
-            <a:off x="6344717" y="944880"/>
-            <a:ext cx="2159203" cy="2933700"/>
+            <a:off x="6344717" y="1088898"/>
+            <a:ext cx="2159203" cy="2789682"/>
           </a:xfrm>
           <a:prstGeom prst="rect">
             <a:avLst/>

--- a/tests/golden/visual/composition/v1_drawing_focus/deck.pptx
+++ b/tests/golden/visual/composition/v1_drawing_focus/deck.pptx
@@ -910,7 +910,7 @@
         <p:spPr>
           <a:xfrm>
             <a:off x="640080" y="411480"/>
-            <a:ext cx="7863840" cy="601218"/>
+            <a:ext cx="7863840" cy="621792"/>
           </a:xfrm>
           <a:prstGeom prst="rect">
             <a:avLst/>
@@ -948,8 +948,8 @@
         </p:nvSpPr>
         <p:spPr>
           <a:xfrm>
-            <a:off x="640080" y="1088898"/>
-            <a:ext cx="5552237" cy="2789682"/>
+            <a:off x="640080" y="1109472"/>
+            <a:ext cx="5552237" cy="2769108"/>
           </a:xfrm>
           <a:prstGeom prst="rect">
             <a:avLst/>
@@ -973,7 +973,7 @@
         </p:nvSpPr>
         <p:spPr>
           <a:xfrm>
-            <a:off x="777240" y="2300859"/>
+            <a:off x="777240" y="2311146"/>
             <a:ext cx="5277917" cy="365760"/>
           </a:xfrm>
           <a:prstGeom prst="rect">
@@ -1012,8 +1012,8 @@
         </p:nvSpPr>
         <p:spPr>
           <a:xfrm>
-            <a:off x="6344717" y="1088898"/>
-            <a:ext cx="2159203" cy="2789682"/>
+            <a:off x="6344717" y="1109472"/>
+            <a:ext cx="2159203" cy="2769108"/>
           </a:xfrm>
           <a:prstGeom prst="rect">
             <a:avLst/>

--- a/tests/golden/visual/composition/v1_drawing_focus/deck.pptx
+++ b/tests/golden/visual/composition/v1_drawing_focus/deck.pptx
@@ -910,7 +910,7 @@
         <p:spPr>
           <a:xfrm>
             <a:off x="640080" y="411480"/>
-            <a:ext cx="7863840" cy="621792"/>
+            <a:ext cx="7863840" cy="601218"/>
           </a:xfrm>
           <a:prstGeom prst="rect">
             <a:avLst/>
@@ -948,8 +948,8 @@
         </p:nvSpPr>
         <p:spPr>
           <a:xfrm>
-            <a:off x="640080" y="1109472"/>
-            <a:ext cx="5552237" cy="2769108"/>
+            <a:off x="640080" y="1088898"/>
+            <a:ext cx="5552237" cy="2822829"/>
           </a:xfrm>
           <a:prstGeom prst="rect">
             <a:avLst/>
@@ -973,7 +973,7 @@
         </p:nvSpPr>
         <p:spPr>
           <a:xfrm>
-            <a:off x="777240" y="2311146"/>
+            <a:off x="777240" y="2317433"/>
             <a:ext cx="5277917" cy="365760"/>
           </a:xfrm>
           <a:prstGeom prst="rect">
@@ -1012,8 +1012,8 @@
         </p:nvSpPr>
         <p:spPr>
           <a:xfrm>
-            <a:off x="6344717" y="1109472"/>
-            <a:ext cx="2159203" cy="2769108"/>
+            <a:off x="6344717" y="1088898"/>
+            <a:ext cx="2159203" cy="2822829"/>
           </a:xfrm>
           <a:prstGeom prst="rect">
             <a:avLst/>
@@ -1051,8 +1051,8 @@
         </p:nvSpPr>
         <p:spPr>
           <a:xfrm>
-            <a:off x="640080" y="3916680"/>
-            <a:ext cx="5111496" cy="256032"/>
+            <a:off x="640080" y="3949827"/>
+            <a:ext cx="5111496" cy="236030"/>
           </a:xfrm>
           <a:prstGeom prst="rect">
             <a:avLst/>
@@ -1090,8 +1090,8 @@
         </p:nvSpPr>
         <p:spPr>
           <a:xfrm>
-            <a:off x="640080" y="4210812"/>
-            <a:ext cx="5111496" cy="201168"/>
+            <a:off x="640080" y="4223957"/>
+            <a:ext cx="5111496" cy="188024"/>
           </a:xfrm>
           <a:prstGeom prst="rect">
             <a:avLst/>

--- a/tests/golden/visual/composition/v1_drawing_focus/deck.pptx
+++ b/tests/golden/visual/composition/v1_drawing_focus/deck.pptx
@@ -949,7 +949,7 @@
         <p:spPr>
           <a:xfrm>
             <a:off x="640080" y="1088898"/>
-            <a:ext cx="5552237" cy="2822829"/>
+            <a:ext cx="6323381" cy="2886837"/>
           </a:xfrm>
           <a:prstGeom prst="rect">
             <a:avLst/>
@@ -973,8 +973,8 @@
         </p:nvSpPr>
         <p:spPr>
           <a:xfrm>
-            <a:off x="777240" y="2317433"/>
-            <a:ext cx="5277917" cy="365760"/>
+            <a:off x="777240" y="2349437"/>
+            <a:ext cx="6049061" cy="365760"/>
           </a:xfrm>
           <a:prstGeom prst="rect">
             <a:avLst/>
@@ -1012,8 +1012,8 @@
         </p:nvSpPr>
         <p:spPr>
           <a:xfrm>
-            <a:off x="6344717" y="1088898"/>
-            <a:ext cx="2159203" cy="2822829"/>
+            <a:off x="7115861" y="1088898"/>
+            <a:ext cx="1388059" cy="2886837"/>
           </a:xfrm>
           <a:prstGeom prst="rect">
             <a:avLst/>
@@ -1051,8 +1051,8 @@
         </p:nvSpPr>
         <p:spPr>
           <a:xfrm>
-            <a:off x="640080" y="3949827"/>
-            <a:ext cx="5111496" cy="236030"/>
+            <a:off x="640080" y="4013835"/>
+            <a:ext cx="5111496" cy="200025"/>
           </a:xfrm>
           <a:prstGeom prst="rect">
             <a:avLst/>
@@ -1090,8 +1090,8 @@
         </p:nvSpPr>
         <p:spPr>
           <a:xfrm>
-            <a:off x="640080" y="4223957"/>
-            <a:ext cx="5111496" cy="188024"/>
+            <a:off x="640080" y="4251960"/>
+            <a:ext cx="5111496" cy="160020"/>
           </a:xfrm>
           <a:prstGeom prst="rect">
             <a:avLst/>

--- a/tests/golden/visual/composition/v1_drawing_focus/deck.pptx
+++ b/tests/golden/visual/composition/v1_drawing_focus/deck.pptx
@@ -580,7 +580,7 @@
     <p:bg>
       <p:bgPr>
         <a:solidFill>
-          <a:srgbClr val="F7F6F3"/>
+          <a:srgbClr val="D9E2EA"/>
         </a:solidFill>
       </p:bgPr>
     </p:bg>
@@ -909,8 +909,8 @@
         </p:nvSpPr>
         <p:spPr>
           <a:xfrm>
-            <a:off x="640080" y="411480"/>
-            <a:ext cx="7863840" cy="601218"/>
+            <a:off x="502920" y="347472"/>
+            <a:ext cx="8138160" cy="384048"/>
           </a:xfrm>
           <a:prstGeom prst="rect">
             <a:avLst/>
@@ -926,9 +926,9 @@
               <a:buNone/>
             </a:pPr>
             <a:r>
-              <a:rPr lang="en-US" sz="3400" b="1" dirty="0">
+              <a:rPr lang="en-US" sz="2000" b="1" dirty="0">
                 <a:solidFill>
-                  <a:srgbClr val="1A1A1A"/>
+                  <a:srgbClr val="1B3A4B"/>
                 </a:solidFill>
                 <a:latin typeface="Microsoft YaHei" pitchFamily="34" charset="0"/>
                 <a:ea typeface="Microsoft YaHei" pitchFamily="34" charset="-122"/>
@@ -936,7 +936,7 @@
               </a:rPr>
               <a:t>总体规划与空间结构</a:t>
             </a:r>
-            <a:endParaRPr lang="en-US" sz="3400" dirty="0"/>
+            <a:endParaRPr lang="en-US" sz="2000" dirty="0"/>
           </a:p>
         </p:txBody>
       </p:sp>
@@ -948,14 +948,14 @@
         </p:nvSpPr>
         <p:spPr>
           <a:xfrm>
-            <a:off x="640080" y="1088898"/>
-            <a:ext cx="6323381" cy="2886837"/>
+            <a:off x="502920" y="807720"/>
+            <a:ext cx="6548323" cy="3220502"/>
           </a:xfrm>
           <a:prstGeom prst="rect">
             <a:avLst/>
           </a:prstGeom>
           <a:solidFill>
-            <a:srgbClr val="FFFFFF"/>
+            <a:srgbClr val="F3F7FA"/>
           </a:solidFill>
           <a:ln w="19050">
             <a:solidFill>
@@ -973,8 +973,8 @@
         </p:nvSpPr>
         <p:spPr>
           <a:xfrm>
-            <a:off x="777240" y="2349437"/>
-            <a:ext cx="6049061" cy="365760"/>
+            <a:off x="640080" y="2235091"/>
+            <a:ext cx="6274003" cy="365760"/>
           </a:xfrm>
           <a:prstGeom prst="rect">
             <a:avLst/>
@@ -992,7 +992,7 @@
             <a:r>
               <a:rPr lang="en-US" sz="1200" dirty="0">
                 <a:solidFill>
-                  <a:srgbClr val="777777"/>
+                  <a:srgbClr val="6A7D8C"/>
                 </a:solidFill>
                 <a:latin typeface="Microsoft YaHei" pitchFamily="34" charset="0"/>
                 <a:ea typeface="Microsoft YaHei" pitchFamily="34" charset="-122"/>
@@ -1012,8 +1012,8 @@
         </p:nvSpPr>
         <p:spPr>
           <a:xfrm>
-            <a:off x="7115861" y="1088898"/>
-            <a:ext cx="1388059" cy="2886837"/>
+            <a:off x="7203643" y="807720"/>
+            <a:ext cx="1437437" cy="3220502"/>
           </a:xfrm>
           <a:prstGeom prst="rect">
             <a:avLst/>
@@ -1029,9 +1029,9 @@
               <a:buNone/>
             </a:pPr>
             <a:r>
-              <a:rPr lang="en-US" sz="2200" b="1" dirty="0">
+              <a:rPr lang="en-US" sz="2000" b="1" dirty="0">
                 <a:solidFill>
-                  <a:srgbClr val="2C3E50"/>
+                  <a:srgbClr val="C45C26"/>
                 </a:solidFill>
                 <a:latin typeface="Microsoft YaHei" pitchFamily="34" charset="0"/>
                 <a:ea typeface="Microsoft YaHei" pitchFamily="34" charset="-122"/>
@@ -1039,7 +1039,7 @@
               </a:rPr>
               <a:t>绿地率 42%</a:t>
             </a:r>
-            <a:endParaRPr lang="en-US" sz="2200" dirty="0"/>
+            <a:endParaRPr lang="en-US" sz="2000" dirty="0"/>
           </a:p>
         </p:txBody>
       </p:sp>
@@ -1051,8 +1051,8 @@
         </p:nvSpPr>
         <p:spPr>
           <a:xfrm>
-            <a:off x="640080" y="4013835"/>
-            <a:ext cx="5111496" cy="200025"/>
+            <a:off x="502920" y="4066322"/>
+            <a:ext cx="5289804" cy="206426"/>
           </a:xfrm>
           <a:prstGeom prst="rect">
             <a:avLst/>
@@ -1068,9 +1068,9 @@
               <a:buNone/>
             </a:pPr>
             <a:r>
-              <a:rPr lang="en-US" sz="1200" dirty="0">
+              <a:rPr lang="en-US" sz="1100" dirty="0">
                 <a:solidFill>
-                  <a:srgbClr val="777777"/>
+                  <a:srgbClr val="3A4F5F"/>
                 </a:solidFill>
                 <a:latin typeface="Microsoft YaHei" pitchFamily="34" charset="0"/>
                 <a:ea typeface="Microsoft YaHei" pitchFamily="34" charset="-122"/>
@@ -1078,7 +1078,7 @@
               </a:rPr>
               <a:t>总平面确立院落轴线与核心公服节点。</a:t>
             </a:r>
-            <a:endParaRPr lang="en-US" sz="1200" dirty="0"/>
+            <a:endParaRPr lang="en-US" sz="1100" dirty="0"/>
           </a:p>
         </p:txBody>
       </p:sp>
@@ -1090,8 +1090,8 @@
         </p:nvSpPr>
         <p:spPr>
           <a:xfrm>
-            <a:off x="640080" y="4251960"/>
-            <a:ext cx="5111496" cy="160020"/>
+            <a:off x="502920" y="4310847"/>
+            <a:ext cx="5289804" cy="165141"/>
           </a:xfrm>
           <a:prstGeom prst="rect">
             <a:avLst/>
@@ -1109,7 +1109,7 @@
             <a:r>
               <a:rPr lang="en-US" sz="800" dirty="0">
                 <a:solidFill>
-                  <a:srgbClr val="777777"/>
+                  <a:srgbClr val="6A7D8C"/>
                 </a:solidFill>
                 <a:latin typeface="Microsoft YaHei" pitchFamily="34" charset="0"/>
                 <a:ea typeface="Microsoft YaHei" pitchFamily="34" charset="-122"/>
